--- a/Pendulum_Seminar_PREMIUM_FINAL.pptx
+++ b/Pendulum_Seminar_PREMIUM_FINAL.pptx
@@ -5,7 +5,7 @@
     <p:sldMasterId id="2147483648" r:id="rId1"/>
   </p:sldMasterIdLst>
   <p:notesMasterIdLst>
-    <p:notesMasterId r:id="rId13"/>
+    <p:notesMasterId r:id="rId12"/>
   </p:notesMasterIdLst>
   <p:sldIdLst>
     <p:sldId id="256" r:id="rId2"/>
@@ -17,8 +17,7 @@
     <p:sldId id="262" r:id="rId8"/>
     <p:sldId id="263" r:id="rId9"/>
     <p:sldId id="264" r:id="rId10"/>
-    <p:sldId id="265" r:id="rId11"/>
-    <p:sldId id="266" r:id="rId12"/>
+    <p:sldId id="266" r:id="rId11"/>
   </p:sldIdLst>
   <p:sldSz cx="12192000" cy="6858000"/>
   <p:notesSz cx="6858000" cy="9144000"/>
@@ -653,141 +652,41 @@
           <a:lstStyle/>
           <a:p>
             <a:r>
+              <a:rPr lang="en-IN" dirty="0"/>
+              <a:t>So, to conclude, a pendulum may look like a very simple object, but it helps us understand some important ideas in physics.</a:t>
+            </a:r>
+          </a:p>
+          <a:p>
+            <a:r>
+              <a:rPr lang="en-IN" dirty="0"/>
+              <a:t>It shows us how </a:t>
+            </a:r>
+            <a:r>
               <a:rPr lang="en-IN" b="1" dirty="0"/>
-              <a:t>Q: What is the bob?</a:t>
+              <a:t>gravity, motion, energy, and time</a:t>
+            </a:r>
+            <a:r>
+              <a:rPr lang="en-IN" dirty="0"/>
+              <a:t> are connected.</a:t>
+            </a:r>
+          </a:p>
+          <a:p>
+            <a:r>
+              <a:rPr lang="en-IN" dirty="0"/>
+              <a:t>And with the simulation, we can actually see these ideas happening instead of only reading about them.</a:t>
+            </a:r>
+          </a:p>
+          <a:p>
+            <a:r>
+              <a:rPr lang="en-IN" dirty="0"/>
+              <a:t>Thank you everyone.</a:t>
             </a:r>
           </a:p>
           <a:p>
             <a:r>
               <a:rPr lang="en-IN" b="1" dirty="0"/>
-              <a:t>Answer:</a:t>
-            </a:r>
-            <a:endParaRPr lang="en-IN" dirty="0"/>
-          </a:p>
-          <a:p>
-            <a:r>
-              <a:rPr lang="en-IN" dirty="0"/>
-              <a:t>The bob is the weight attached to the end of the pendulum.</a:t>
-            </a:r>
-          </a:p>
-          <a:p>
-            <a:r>
-              <a:rPr lang="en-IN" b="1" dirty="0"/>
-              <a:t>Q: What makes the pendulum swing?</a:t>
-            </a:r>
-          </a:p>
-          <a:p>
-            <a:r>
-              <a:rPr lang="en-IN" b="1" dirty="0"/>
-              <a:t>Answer:</a:t>
-            </a:r>
-            <a:endParaRPr lang="en-IN" dirty="0"/>
-          </a:p>
-          <a:p>
-            <a:r>
-              <a:rPr lang="en-IN" dirty="0"/>
-              <a:t>Gravity pulls the bob toward its lowest position.</a:t>
-            </a:r>
-          </a:p>
-          <a:p>
-            <a:r>
-              <a:rPr lang="en-IN" b="1" dirty="0"/>
-              <a:t>Q: What is the time period?</a:t>
-            </a:r>
-          </a:p>
-          <a:p>
-            <a:r>
-              <a:rPr lang="en-IN" b="1" dirty="0"/>
-              <a:t>Answer:</a:t>
-            </a:r>
-            <a:endParaRPr lang="en-IN" dirty="0"/>
-          </a:p>
-          <a:p>
-            <a:r>
-              <a:rPr lang="en-IN" dirty="0"/>
-              <a:t>It is the time taken for one complete oscillation.</a:t>
-            </a:r>
-          </a:p>
-          <a:p>
-            <a:r>
-              <a:rPr lang="en-IN" b="1" dirty="0"/>
-              <a:t>Q: What happens if the pendulum becomes longer?</a:t>
-            </a:r>
-          </a:p>
-          <a:p>
-            <a:r>
-              <a:rPr lang="en-IN" b="1" dirty="0"/>
-              <a:t>Answer:</a:t>
-            </a:r>
-            <a:endParaRPr lang="en-IN" dirty="0"/>
-          </a:p>
-          <a:p>
-            <a:r>
-              <a:rPr lang="en-IN" dirty="0"/>
-              <a:t>Its time period becomes longer, for small swings.</a:t>
-            </a:r>
-          </a:p>
-          <a:p>
-            <a:r>
-              <a:rPr lang="en-IN" b="1" dirty="0"/>
-              <a:t>Q: Does the mass of the bob affect the ideal time period?</a:t>
-            </a:r>
-          </a:p>
-          <a:p>
-            <a:r>
-              <a:rPr lang="en-IN" b="1" dirty="0"/>
-              <a:t>Answer:</a:t>
-            </a:r>
-            <a:endParaRPr lang="en-IN" dirty="0"/>
-          </a:p>
-          <a:p>
-            <a:r>
-              <a:rPr lang="en-IN" dirty="0"/>
-              <a:t>No. For an ideal simple pendulum, changing the mass does not change the time period.</a:t>
-            </a:r>
-          </a:p>
-          <a:p>
-            <a:r>
-              <a:rPr lang="en-IN" b="1" dirty="0"/>
-              <a:t>Q: Why does a real pendulum eventually stop?</a:t>
-            </a:r>
-          </a:p>
-          <a:p>
-            <a:r>
-              <a:rPr lang="en-IN" b="1" dirty="0"/>
-              <a:t>Answer:</a:t>
-            </a:r>
-            <a:endParaRPr lang="en-IN" dirty="0"/>
-          </a:p>
-          <a:p>
-            <a:r>
-              <a:rPr lang="en-IN" dirty="0"/>
-              <a:t>Because friction and air resistance remove energy from the system.</a:t>
-            </a:r>
-          </a:p>
-          <a:p>
-            <a:r>
-              <a:rPr lang="en-IN" b="1" dirty="0"/>
-              <a:t>Q: Why does the bob move faster at the bottom?</a:t>
-            </a:r>
-          </a:p>
-          <a:p>
-            <a:r>
-              <a:rPr lang="en-IN" b="1" dirty="0"/>
-              <a:t>Answer:</a:t>
-            </a:r>
-            <a:endParaRPr lang="en-IN" dirty="0"/>
-          </a:p>
-          <a:p>
-            <a:r>
-              <a:rPr lang="en-IN" dirty="0"/>
-              <a:t>As it moves downward, gravitational potential energy changes into kinetic energy, so its speed increases.</a:t>
-            </a:r>
-          </a:p>
-          <a:p>
-            <a:br>
-              <a:rPr lang="en-IN" dirty="0"/>
-            </a:br>
+              <a:t>Any questions?</a:t>
+            </a:r>
             <a:endParaRPr lang="en-IN" dirty="0"/>
           </a:p>
           <a:p>
@@ -813,129 +712,6 @@
             <a:fld id="{2DC6A737-2DBA-4410-AE21-2FF01CF84DBD}" type="slidenum">
               <a:rPr lang="en-IN" smtClean="0"/>
               <a:t>10</a:t>
-            </a:fld>
-            <a:endParaRPr lang="en-IN"/>
-          </a:p>
-        </p:txBody>
-      </p:sp>
-    </p:spTree>
-    <p:extLst>
-      <p:ext uri="{BB962C8B-B14F-4D97-AF65-F5344CB8AC3E}">
-        <p14:creationId xmlns:p14="http://schemas.microsoft.com/office/powerpoint/2010/main" val="2143648139"/>
-      </p:ext>
-    </p:extLst>
-  </p:cSld>
-  <p:clrMapOvr>
-    <a:masterClrMapping/>
-  </p:clrMapOvr>
-</p:notes>
-</file>
-
-<file path=ppt/notesSlides/notesSlide11.xml><?xml version="1.0" encoding="utf-8"?>
-<p:notes xmlns:a="http://schemas.openxmlformats.org/drawingml/2006/main" xmlns:r="http://schemas.openxmlformats.org/officeDocument/2006/relationships" xmlns:p="http://schemas.openxmlformats.org/presentationml/2006/main">
-  <p:cSld>
-    <p:spTree>
-      <p:nvGrpSpPr>
-        <p:cNvPr id="1" name=""/>
-        <p:cNvGrpSpPr/>
-        <p:nvPr/>
-      </p:nvGrpSpPr>
-      <p:grpSpPr>
-        <a:xfrm>
-          <a:off x="0" y="0"/>
-          <a:ext cx="0" cy="0"/>
-          <a:chOff x="0" y="0"/>
-          <a:chExt cx="0" cy="0"/>
-        </a:xfrm>
-      </p:grpSpPr>
-      <p:sp>
-        <p:nvSpPr>
-          <p:cNvPr id="2" name="Slide Image Placeholder 1"/>
-          <p:cNvSpPr>
-            <a:spLocks noGrp="1" noRot="1" noChangeAspect="1"/>
-          </p:cNvSpPr>
-          <p:nvPr>
-            <p:ph type="sldImg"/>
-          </p:nvPr>
-        </p:nvSpPr>
-        <p:spPr/>
-      </p:sp>
-      <p:sp>
-        <p:nvSpPr>
-          <p:cNvPr id="3" name="Notes Placeholder 2"/>
-          <p:cNvSpPr>
-            <a:spLocks noGrp="1"/>
-          </p:cNvSpPr>
-          <p:nvPr>
-            <p:ph type="body" idx="1"/>
-          </p:nvPr>
-        </p:nvSpPr>
-        <p:spPr/>
-        <p:txBody>
-          <a:bodyPr/>
-          <a:lstStyle/>
-          <a:p>
-            <a:r>
-              <a:rPr lang="en-IN" dirty="0"/>
-              <a:t>So, to conclude, a pendulum may look like a very simple object, but it helps us understand some important ideas in physics.</a:t>
-            </a:r>
-          </a:p>
-          <a:p>
-            <a:r>
-              <a:rPr lang="en-IN" dirty="0"/>
-              <a:t>It shows us how </a:t>
-            </a:r>
-            <a:r>
-              <a:rPr lang="en-IN" b="1" dirty="0"/>
-              <a:t>gravity, motion, energy, and time</a:t>
-            </a:r>
-            <a:r>
-              <a:rPr lang="en-IN" dirty="0"/>
-              <a:t> are connected.</a:t>
-            </a:r>
-          </a:p>
-          <a:p>
-            <a:r>
-              <a:rPr lang="en-IN" dirty="0"/>
-              <a:t>And with the simulation, we can actually see these ideas happening instead of only reading about them.</a:t>
-            </a:r>
-          </a:p>
-          <a:p>
-            <a:r>
-              <a:rPr lang="en-IN" dirty="0"/>
-              <a:t>Thank you everyone.</a:t>
-            </a:r>
-          </a:p>
-          <a:p>
-            <a:r>
-              <a:rPr lang="en-IN" b="1" dirty="0"/>
-              <a:t>Any questions?</a:t>
-            </a:r>
-            <a:endParaRPr lang="en-IN" dirty="0"/>
-          </a:p>
-          <a:p>
-            <a:endParaRPr lang="en-IN" dirty="0"/>
-          </a:p>
-        </p:txBody>
-      </p:sp>
-      <p:sp>
-        <p:nvSpPr>
-          <p:cNvPr id="4" name="Slide Number Placeholder 3"/>
-          <p:cNvSpPr>
-            <a:spLocks noGrp="1"/>
-          </p:cNvSpPr>
-          <p:nvPr>
-            <p:ph type="sldNum" sz="quarter" idx="5"/>
-          </p:nvPr>
-        </p:nvSpPr>
-        <p:spPr/>
-        <p:txBody>
-          <a:bodyPr/>
-          <a:lstStyle/>
-          <a:p>
-            <a:fld id="{2DC6A737-2DBA-4410-AE21-2FF01CF84DBD}" type="slidenum">
-              <a:rPr lang="en-IN" smtClean="0"/>
-              <a:t>11</a:t>
             </a:fld>
             <a:endParaRPr lang="en-IN"/>
           </a:p>
@@ -5456,13 +5232,13 @@
   <p:clrMapOvr>
     <a:masterClrMapping/>
   </p:clrMapOvr>
-  <mc:AlternateContent xmlns:mc="http://schemas.openxmlformats.org/markup-compatibility/2006">
-    <mc:Choice xmlns:p159="http://schemas.microsoft.com/office/powerpoint/2015/09/main" Requires="p159">
+  <mc:AlternateContent xmlns:mc="http://schemas.openxmlformats.org/markup-compatibility/2006" xmlns:p159="http://schemas.microsoft.com/office/powerpoint/2015/09/main">
+    <mc:Choice Requires="p159">
       <p:transition xmlns:p14="http://schemas.microsoft.com/office/powerpoint/2010/main" spd="slow" p14:dur="2000">
         <p159:morph option="byObject"/>
       </p:transition>
     </mc:Choice>
-    <mc:Fallback>
+    <mc:Fallback xmlns="">
       <p:transition spd="slow">
         <p:fade/>
       </p:transition>
@@ -5498,780 +5274,6 @@
       </p:grpSpPr>
       <p:sp>
         <p:nvSpPr>
-          <p:cNvPr id="2" name="Rectangle 1"/>
-          <p:cNvSpPr/>
-          <p:nvPr/>
-        </p:nvSpPr>
-        <p:spPr>
-          <a:xfrm>
-            <a:off x="502920" y="347472"/>
-            <a:ext cx="73152" cy="566928"/>
-          </a:xfrm>
-          <a:prstGeom prst="rect">
-            <a:avLst/>
-          </a:prstGeom>
-          <a:solidFill>
-            <a:srgbClr val="63E1FF"/>
-          </a:solidFill>
-          <a:ln>
-            <a:noFill/>
-          </a:ln>
-        </p:spPr>
-        <p:style>
-          <a:lnRef idx="1">
-            <a:schemeClr val="accent1"/>
-          </a:lnRef>
-          <a:fillRef idx="3">
-            <a:schemeClr val="accent1"/>
-          </a:fillRef>
-          <a:effectRef idx="2">
-            <a:schemeClr val="accent1"/>
-          </a:effectRef>
-          <a:fontRef idx="minor">
-            <a:schemeClr val="lt1"/>
-          </a:fontRef>
-        </p:style>
-        <p:txBody>
-          <a:bodyPr rtlCol="0" anchor="ctr"/>
-          <a:lstStyle/>
-          <a:p>
-            <a:pPr algn="ctr"/>
-            <a:endParaRPr/>
-          </a:p>
-        </p:txBody>
-      </p:sp>
-      <p:sp>
-        <p:nvSpPr>
-          <p:cNvPr id="3" name="TextBox 2"/>
-          <p:cNvSpPr txBox="1"/>
-          <p:nvPr/>
-        </p:nvSpPr>
-        <p:spPr>
-          <a:xfrm>
-            <a:off x="731520" y="320040"/>
-            <a:ext cx="10515600" cy="566928"/>
-          </a:xfrm>
-          <a:prstGeom prst="rect">
-            <a:avLst/>
-          </a:prstGeom>
-          <a:noFill/>
-        </p:spPr>
-        <p:txBody>
-          <a:bodyPr wrap="none">
-            <a:spAutoFit/>
-          </a:bodyPr>
-          <a:lstStyle/>
-          <a:p>
-            <a:pPr>
-              <a:defRPr sz="2900" b="1">
-                <a:solidFill>
-                  <a:srgbClr val="F4F8FF"/>
-                </a:solidFill>
-              </a:defRPr>
-            </a:pPr>
-            <a:r>
-              <a:t>9. ❓ Quick Q&amp;A</a:t>
-            </a:r>
-          </a:p>
-        </p:txBody>
-      </p:sp>
-      <p:sp>
-        <p:nvSpPr>
-          <p:cNvPr id="4" name="TextBox 3"/>
-          <p:cNvSpPr txBox="1"/>
-          <p:nvPr/>
-        </p:nvSpPr>
-        <p:spPr>
-          <a:xfrm>
-            <a:off x="749808" y="914400"/>
-            <a:ext cx="10332720" cy="320040"/>
-          </a:xfrm>
-          <a:prstGeom prst="rect">
-            <a:avLst/>
-          </a:prstGeom>
-          <a:noFill/>
-        </p:spPr>
-        <p:txBody>
-          <a:bodyPr wrap="none">
-            <a:spAutoFit/>
-          </a:bodyPr>
-          <a:lstStyle/>
-          <a:p>
-            <a:pPr>
-              <a:defRPr sz="1300">
-                <a:solidFill>
-                  <a:srgbClr val="A8B8D2"/>
-                </a:solidFill>
-              </a:defRPr>
-            </a:pPr>
-            <a:r>
-              <a:t>Questions your teacher or classmates may ask.</a:t>
-            </a:r>
-          </a:p>
-        </p:txBody>
-      </p:sp>
-      <p:sp>
-        <p:nvSpPr>
-          <p:cNvPr id="5" name="TextBox 4"/>
-          <p:cNvSpPr txBox="1"/>
-          <p:nvPr/>
-        </p:nvSpPr>
-        <p:spPr>
-          <a:xfrm>
-            <a:off x="11201400" y="384048"/>
-            <a:ext cx="411480" cy="320040"/>
-          </a:xfrm>
-          <a:prstGeom prst="rect">
-            <a:avLst/>
-          </a:prstGeom>
-          <a:noFill/>
-        </p:spPr>
-        <p:txBody>
-          <a:bodyPr wrap="none">
-            <a:spAutoFit/>
-          </a:bodyPr>
-          <a:lstStyle/>
-          <a:p>
-            <a:pPr algn="r">
-              <a:defRPr sz="1300">
-                <a:solidFill>
-                  <a:srgbClr val="A8B8D2"/>
-                </a:solidFill>
-              </a:defRPr>
-            </a:pPr>
-            <a:r>
-              <a:t>10</a:t>
-            </a:r>
-          </a:p>
-        </p:txBody>
-      </p:sp>
-      <p:sp>
-        <p:nvSpPr>
-          <p:cNvPr id="6" name="Rounded Rectangle 5"/>
-          <p:cNvSpPr/>
-          <p:nvPr/>
-        </p:nvSpPr>
-        <p:spPr>
-          <a:xfrm>
-            <a:off x="731520" y="1417320"/>
-            <a:ext cx="5257800" cy="1078992"/>
-          </a:xfrm>
-          <a:prstGeom prst="roundRect">
-            <a:avLst/>
-          </a:prstGeom>
-          <a:solidFill>
-            <a:srgbClr val="111C30"/>
-          </a:solidFill>
-          <a:ln>
-            <a:solidFill>
-              <a:srgbClr val="2A3D5C"/>
-            </a:solidFill>
-          </a:ln>
-        </p:spPr>
-        <p:style>
-          <a:lnRef idx="1">
-            <a:schemeClr val="accent1"/>
-          </a:lnRef>
-          <a:fillRef idx="3">
-            <a:schemeClr val="accent1"/>
-          </a:fillRef>
-          <a:effectRef idx="2">
-            <a:schemeClr val="accent1"/>
-          </a:effectRef>
-          <a:fontRef idx="minor">
-            <a:schemeClr val="lt1"/>
-          </a:fontRef>
-        </p:style>
-        <p:txBody>
-          <a:bodyPr rtlCol="0" anchor="ctr"/>
-          <a:lstStyle/>
-          <a:p>
-            <a:pPr algn="ctr"/>
-            <a:endParaRPr/>
-          </a:p>
-        </p:txBody>
-      </p:sp>
-      <p:sp>
-        <p:nvSpPr>
-          <p:cNvPr id="7" name="TextBox 6"/>
-          <p:cNvSpPr txBox="1"/>
-          <p:nvPr/>
-        </p:nvSpPr>
-        <p:spPr>
-          <a:xfrm>
-            <a:off x="960120" y="1581912"/>
-            <a:ext cx="4800600" cy="320040"/>
-          </a:xfrm>
-          <a:prstGeom prst="rect">
-            <a:avLst/>
-          </a:prstGeom>
-          <a:noFill/>
-        </p:spPr>
-        <p:txBody>
-          <a:bodyPr wrap="square">
-            <a:spAutoFit/>
-          </a:bodyPr>
-          <a:lstStyle/>
-          <a:p>
-            <a:pPr algn="l">
-              <a:defRPr sz="1500" b="1">
-                <a:solidFill>
-                  <a:srgbClr val="63E1FF"/>
-                </a:solidFill>
-              </a:defRPr>
-            </a:pPr>
-            <a:r>
-              <a:t>What is the bob?</a:t>
-            </a:r>
-          </a:p>
-        </p:txBody>
-      </p:sp>
-      <p:sp>
-        <p:nvSpPr>
-          <p:cNvPr id="8" name="TextBox 7"/>
-          <p:cNvSpPr txBox="1"/>
-          <p:nvPr/>
-        </p:nvSpPr>
-        <p:spPr>
-          <a:xfrm>
-            <a:off x="960120" y="1947672"/>
-            <a:ext cx="4800600" cy="347472"/>
-          </a:xfrm>
-          <a:prstGeom prst="rect">
-            <a:avLst/>
-          </a:prstGeom>
-          <a:noFill/>
-        </p:spPr>
-        <p:txBody>
-          <a:bodyPr wrap="square">
-            <a:spAutoFit/>
-          </a:bodyPr>
-          <a:lstStyle/>
-          <a:p>
-            <a:pPr algn="l">
-              <a:defRPr sz="1300" b="0">
-                <a:solidFill>
-                  <a:srgbClr val="F4F8FF"/>
-                </a:solidFill>
-              </a:defRPr>
-            </a:pPr>
-            <a:r>
-              <a:t>The weight at the end.</a:t>
-            </a:r>
-          </a:p>
-        </p:txBody>
-      </p:sp>
-      <p:sp>
-        <p:nvSpPr>
-          <p:cNvPr id="9" name="Rounded Rectangle 8"/>
-          <p:cNvSpPr/>
-          <p:nvPr/>
-        </p:nvSpPr>
-        <p:spPr>
-          <a:xfrm>
-            <a:off x="731520" y="2834640"/>
-            <a:ext cx="5257800" cy="1078992"/>
-          </a:xfrm>
-          <a:prstGeom prst="roundRect">
-            <a:avLst/>
-          </a:prstGeom>
-          <a:solidFill>
-            <a:srgbClr val="111C30"/>
-          </a:solidFill>
-          <a:ln>
-            <a:solidFill>
-              <a:srgbClr val="2A3D5C"/>
-            </a:solidFill>
-          </a:ln>
-        </p:spPr>
-        <p:style>
-          <a:lnRef idx="1">
-            <a:schemeClr val="accent1"/>
-          </a:lnRef>
-          <a:fillRef idx="3">
-            <a:schemeClr val="accent1"/>
-          </a:fillRef>
-          <a:effectRef idx="2">
-            <a:schemeClr val="accent1"/>
-          </a:effectRef>
-          <a:fontRef idx="minor">
-            <a:schemeClr val="lt1"/>
-          </a:fontRef>
-        </p:style>
-        <p:txBody>
-          <a:bodyPr rtlCol="0" anchor="ctr"/>
-          <a:lstStyle/>
-          <a:p>
-            <a:pPr algn="ctr"/>
-            <a:endParaRPr/>
-          </a:p>
-        </p:txBody>
-      </p:sp>
-      <p:sp>
-        <p:nvSpPr>
-          <p:cNvPr id="10" name="TextBox 9"/>
-          <p:cNvSpPr txBox="1"/>
-          <p:nvPr/>
-        </p:nvSpPr>
-        <p:spPr>
-          <a:xfrm>
-            <a:off x="960120" y="2999232"/>
-            <a:ext cx="4800600" cy="320040"/>
-          </a:xfrm>
-          <a:prstGeom prst="rect">
-            <a:avLst/>
-          </a:prstGeom>
-          <a:noFill/>
-        </p:spPr>
-        <p:txBody>
-          <a:bodyPr wrap="square">
-            <a:spAutoFit/>
-          </a:bodyPr>
-          <a:lstStyle/>
-          <a:p>
-            <a:pPr algn="l">
-              <a:defRPr sz="1500" b="1">
-                <a:solidFill>
-                  <a:srgbClr val="63E1FF"/>
-                </a:solidFill>
-              </a:defRPr>
-            </a:pPr>
-            <a:r>
-              <a:t>What is the time period?</a:t>
-            </a:r>
-          </a:p>
-        </p:txBody>
-      </p:sp>
-      <p:sp>
-        <p:nvSpPr>
-          <p:cNvPr id="11" name="TextBox 10"/>
-          <p:cNvSpPr txBox="1"/>
-          <p:nvPr/>
-        </p:nvSpPr>
-        <p:spPr>
-          <a:xfrm>
-            <a:off x="960120" y="3364992"/>
-            <a:ext cx="4800600" cy="347472"/>
-          </a:xfrm>
-          <a:prstGeom prst="rect">
-            <a:avLst/>
-          </a:prstGeom>
-          <a:noFill/>
-        </p:spPr>
-        <p:txBody>
-          <a:bodyPr wrap="square">
-            <a:spAutoFit/>
-          </a:bodyPr>
-          <a:lstStyle/>
-          <a:p>
-            <a:pPr algn="l">
-              <a:defRPr sz="1300" b="0">
-                <a:solidFill>
-                  <a:srgbClr val="F4F8FF"/>
-                </a:solidFill>
-              </a:defRPr>
-            </a:pPr>
-            <a:r>
-              <a:t>Time for one complete oscillation.</a:t>
-            </a:r>
-          </a:p>
-        </p:txBody>
-      </p:sp>
-      <p:sp>
-        <p:nvSpPr>
-          <p:cNvPr id="12" name="Rounded Rectangle 11"/>
-          <p:cNvSpPr/>
-          <p:nvPr/>
-        </p:nvSpPr>
-        <p:spPr>
-          <a:xfrm>
-            <a:off x="731520" y="4251960"/>
-            <a:ext cx="5257800" cy="1078992"/>
-          </a:xfrm>
-          <a:prstGeom prst="roundRect">
-            <a:avLst/>
-          </a:prstGeom>
-          <a:solidFill>
-            <a:srgbClr val="111C30"/>
-          </a:solidFill>
-          <a:ln>
-            <a:solidFill>
-              <a:srgbClr val="2A3D5C"/>
-            </a:solidFill>
-          </a:ln>
-        </p:spPr>
-        <p:style>
-          <a:lnRef idx="1">
-            <a:schemeClr val="accent1"/>
-          </a:lnRef>
-          <a:fillRef idx="3">
-            <a:schemeClr val="accent1"/>
-          </a:fillRef>
-          <a:effectRef idx="2">
-            <a:schemeClr val="accent1"/>
-          </a:effectRef>
-          <a:fontRef idx="minor">
-            <a:schemeClr val="lt1"/>
-          </a:fontRef>
-        </p:style>
-        <p:txBody>
-          <a:bodyPr rtlCol="0" anchor="ctr"/>
-          <a:lstStyle/>
-          <a:p>
-            <a:pPr algn="ctr"/>
-            <a:endParaRPr/>
-          </a:p>
-        </p:txBody>
-      </p:sp>
-      <p:sp>
-        <p:nvSpPr>
-          <p:cNvPr id="13" name="TextBox 12"/>
-          <p:cNvSpPr txBox="1"/>
-          <p:nvPr/>
-        </p:nvSpPr>
-        <p:spPr>
-          <a:xfrm>
-            <a:off x="960120" y="4416552"/>
-            <a:ext cx="4800600" cy="320040"/>
-          </a:xfrm>
-          <a:prstGeom prst="rect">
-            <a:avLst/>
-          </a:prstGeom>
-          <a:noFill/>
-        </p:spPr>
-        <p:txBody>
-          <a:bodyPr wrap="square">
-            <a:spAutoFit/>
-          </a:bodyPr>
-          <a:lstStyle/>
-          <a:p>
-            <a:pPr algn="l">
-              <a:defRPr sz="1500" b="1">
-                <a:solidFill>
-                  <a:srgbClr val="63E1FF"/>
-                </a:solidFill>
-              </a:defRPr>
-            </a:pPr>
-            <a:r>
-              <a:t>What pulls it toward the middle?</a:t>
-            </a:r>
-          </a:p>
-        </p:txBody>
-      </p:sp>
-      <p:sp>
-        <p:nvSpPr>
-          <p:cNvPr id="14" name="TextBox 13"/>
-          <p:cNvSpPr txBox="1"/>
-          <p:nvPr/>
-        </p:nvSpPr>
-        <p:spPr>
-          <a:xfrm>
-            <a:off x="960120" y="4782312"/>
-            <a:ext cx="4800600" cy="347472"/>
-          </a:xfrm>
-          <a:prstGeom prst="rect">
-            <a:avLst/>
-          </a:prstGeom>
-          <a:noFill/>
-        </p:spPr>
-        <p:txBody>
-          <a:bodyPr wrap="square">
-            <a:spAutoFit/>
-          </a:bodyPr>
-          <a:lstStyle/>
-          <a:p>
-            <a:pPr algn="l">
-              <a:defRPr sz="1300" b="0">
-                <a:solidFill>
-                  <a:srgbClr val="F4F8FF"/>
-                </a:solidFill>
-              </a:defRPr>
-            </a:pPr>
-            <a:r>
-              <a:t>Gravity.</a:t>
-            </a:r>
-          </a:p>
-        </p:txBody>
-      </p:sp>
-      <p:sp>
-        <p:nvSpPr>
-          <p:cNvPr id="15" name="Rounded Rectangle 14"/>
-          <p:cNvSpPr/>
-          <p:nvPr/>
-        </p:nvSpPr>
-        <p:spPr>
-          <a:xfrm>
-            <a:off x="6217920" y="1417320"/>
-            <a:ext cx="5257800" cy="1078992"/>
-          </a:xfrm>
-          <a:prstGeom prst="roundRect">
-            <a:avLst/>
-          </a:prstGeom>
-          <a:solidFill>
-            <a:srgbClr val="111C30"/>
-          </a:solidFill>
-          <a:ln>
-            <a:solidFill>
-              <a:srgbClr val="2A3D5C"/>
-            </a:solidFill>
-          </a:ln>
-        </p:spPr>
-        <p:style>
-          <a:lnRef idx="1">
-            <a:schemeClr val="accent1"/>
-          </a:lnRef>
-          <a:fillRef idx="3">
-            <a:schemeClr val="accent1"/>
-          </a:fillRef>
-          <a:effectRef idx="2">
-            <a:schemeClr val="accent1"/>
-          </a:effectRef>
-          <a:fontRef idx="minor">
-            <a:schemeClr val="lt1"/>
-          </a:fontRef>
-        </p:style>
-        <p:txBody>
-          <a:bodyPr rtlCol="0" anchor="ctr"/>
-          <a:lstStyle/>
-          <a:p>
-            <a:pPr algn="ctr"/>
-            <a:endParaRPr/>
-          </a:p>
-        </p:txBody>
-      </p:sp>
-      <p:sp>
-        <p:nvSpPr>
-          <p:cNvPr id="16" name="TextBox 15"/>
-          <p:cNvSpPr txBox="1"/>
-          <p:nvPr/>
-        </p:nvSpPr>
-        <p:spPr>
-          <a:xfrm>
-            <a:off x="6446520" y="1581912"/>
-            <a:ext cx="4800600" cy="320040"/>
-          </a:xfrm>
-          <a:prstGeom prst="rect">
-            <a:avLst/>
-          </a:prstGeom>
-          <a:noFill/>
-        </p:spPr>
-        <p:txBody>
-          <a:bodyPr wrap="square">
-            <a:spAutoFit/>
-          </a:bodyPr>
-          <a:lstStyle/>
-          <a:p>
-            <a:pPr algn="l">
-              <a:defRPr sz="1500" b="1">
-                <a:solidFill>
-                  <a:srgbClr val="63E1FF"/>
-                </a:solidFill>
-              </a:defRPr>
-            </a:pPr>
-            <a:r>
-              <a:t>What happens when length increases?</a:t>
-            </a:r>
-          </a:p>
-        </p:txBody>
-      </p:sp>
-      <p:sp>
-        <p:nvSpPr>
-          <p:cNvPr id="17" name="TextBox 16"/>
-          <p:cNvSpPr txBox="1"/>
-          <p:nvPr/>
-        </p:nvSpPr>
-        <p:spPr>
-          <a:xfrm>
-            <a:off x="6446520" y="1947672"/>
-            <a:ext cx="4800600" cy="347472"/>
-          </a:xfrm>
-          <a:prstGeom prst="rect">
-            <a:avLst/>
-          </a:prstGeom>
-          <a:noFill/>
-        </p:spPr>
-        <p:txBody>
-          <a:bodyPr wrap="square">
-            <a:spAutoFit/>
-          </a:bodyPr>
-          <a:lstStyle/>
-          <a:p>
-            <a:pPr algn="l">
-              <a:defRPr sz="1300" b="0">
-                <a:solidFill>
-                  <a:srgbClr val="F4F8FF"/>
-                </a:solidFill>
-              </a:defRPr>
-            </a:pPr>
-            <a:r>
-              <a:t>The period increases for small swings.</a:t>
-            </a:r>
-          </a:p>
-        </p:txBody>
-      </p:sp>
-      <p:sp>
-        <p:nvSpPr>
-          <p:cNvPr id="18" name="Rounded Rectangle 17"/>
-          <p:cNvSpPr/>
-          <p:nvPr/>
-        </p:nvSpPr>
-        <p:spPr>
-          <a:xfrm>
-            <a:off x="6217920" y="2834640"/>
-            <a:ext cx="5257800" cy="1078992"/>
-          </a:xfrm>
-          <a:prstGeom prst="roundRect">
-            <a:avLst/>
-          </a:prstGeom>
-          <a:solidFill>
-            <a:srgbClr val="111C30"/>
-          </a:solidFill>
-          <a:ln>
-            <a:solidFill>
-              <a:srgbClr val="2A3D5C"/>
-            </a:solidFill>
-          </a:ln>
-        </p:spPr>
-        <p:style>
-          <a:lnRef idx="1">
-            <a:schemeClr val="accent1"/>
-          </a:lnRef>
-          <a:fillRef idx="3">
-            <a:schemeClr val="accent1"/>
-          </a:fillRef>
-          <a:effectRef idx="2">
-            <a:schemeClr val="accent1"/>
-          </a:effectRef>
-          <a:fontRef idx="minor">
-            <a:schemeClr val="lt1"/>
-          </a:fontRef>
-        </p:style>
-        <p:txBody>
-          <a:bodyPr rtlCol="0" anchor="ctr"/>
-          <a:lstStyle/>
-          <a:p>
-            <a:pPr algn="ctr"/>
-            <a:endParaRPr/>
-          </a:p>
-        </p:txBody>
-      </p:sp>
-      <p:sp>
-        <p:nvSpPr>
-          <p:cNvPr id="19" name="TextBox 18"/>
-          <p:cNvSpPr txBox="1"/>
-          <p:nvPr/>
-        </p:nvSpPr>
-        <p:spPr>
-          <a:xfrm>
-            <a:off x="6446520" y="2999232"/>
-            <a:ext cx="4800600" cy="320040"/>
-          </a:xfrm>
-          <a:prstGeom prst="rect">
-            <a:avLst/>
-          </a:prstGeom>
-          <a:noFill/>
-        </p:spPr>
-        <p:txBody>
-          <a:bodyPr wrap="square">
-            <a:spAutoFit/>
-          </a:bodyPr>
-          <a:lstStyle/>
-          <a:p>
-            <a:pPr algn="l">
-              <a:defRPr sz="1500" b="1">
-                <a:solidFill>
-                  <a:srgbClr val="63E1FF"/>
-                </a:solidFill>
-              </a:defRPr>
-            </a:pPr>
-            <a:r>
-              <a:t>Why does a real pendulum stop?</a:t>
-            </a:r>
-          </a:p>
-        </p:txBody>
-      </p:sp>
-      <p:sp>
-        <p:nvSpPr>
-          <p:cNvPr id="20" name="TextBox 19"/>
-          <p:cNvSpPr txBox="1"/>
-          <p:nvPr/>
-        </p:nvSpPr>
-        <p:spPr>
-          <a:xfrm>
-            <a:off x="6446520" y="3364992"/>
-            <a:ext cx="4800600" cy="347472"/>
-          </a:xfrm>
-          <a:prstGeom prst="rect">
-            <a:avLst/>
-          </a:prstGeom>
-          <a:noFill/>
-        </p:spPr>
-        <p:txBody>
-          <a:bodyPr wrap="square">
-            <a:spAutoFit/>
-          </a:bodyPr>
-          <a:lstStyle/>
-          <a:p>
-            <a:pPr algn="l">
-              <a:defRPr sz="1300" b="0">
-                <a:solidFill>
-                  <a:srgbClr val="F4F8FF"/>
-                </a:solidFill>
-              </a:defRPr>
-            </a:pPr>
-            <a:r>
-              <a:t>Friction and air resistance remove energy.</a:t>
-            </a:r>
-          </a:p>
-        </p:txBody>
-      </p:sp>
-    </p:spTree>
-  </p:cSld>
-  <p:clrMapOvr>
-    <a:masterClrMapping/>
-  </p:clrMapOvr>
-  <mc:AlternateContent xmlns:mc="http://schemas.openxmlformats.org/markup-compatibility/2006">
-    <mc:Choice xmlns:p15="http://schemas.microsoft.com/office/powerpoint/2012/main" Requires="p15">
-      <p:transition xmlns:p14="http://schemas.microsoft.com/office/powerpoint/2010/main" spd="slow" p14:dur="1250">
-        <p15:prstTrans prst="pageCurlDouble"/>
-      </p:transition>
-    </mc:Choice>
-    <mc:Fallback>
-      <p:transition spd="slow">
-        <p:fade/>
-      </p:transition>
-    </mc:Fallback>
-  </mc:AlternateContent>
-</p:sld>
-</file>
-
-<file path=ppt/slides/slide11.xml><?xml version="1.0" encoding="utf-8"?>
-<p:sld xmlns:a="http://schemas.openxmlformats.org/drawingml/2006/main" xmlns:r="http://schemas.openxmlformats.org/officeDocument/2006/relationships" xmlns:p="http://schemas.openxmlformats.org/presentationml/2006/main">
-  <p:cSld>
-    <p:bg>
-      <p:bgPr>
-        <a:solidFill>
-          <a:srgbClr val="070C18"/>
-        </a:solidFill>
-        <a:effectLst/>
-      </p:bgPr>
-    </p:bg>
-    <p:spTree>
-      <p:nvGrpSpPr>
-        <p:cNvPr id="1" name=""/>
-        <p:cNvGrpSpPr/>
-        <p:nvPr/>
-      </p:nvGrpSpPr>
-      <p:grpSpPr>
-        <a:xfrm>
-          <a:off x="0" y="0"/>
-          <a:ext cx="0" cy="0"/>
-          <a:chOff x="0" y="0"/>
-          <a:chExt cx="0" cy="0"/>
-        </a:xfrm>
-      </p:grpSpPr>
-      <p:sp>
-        <p:nvSpPr>
           <p:cNvPr id="2" name="TextBox 1"/>
           <p:cNvSpPr txBox="1"/>
           <p:nvPr/>
@@ -6602,53 +5604,18 @@
           </a:p>
         </p:txBody>
       </p:sp>
-      <p:sp>
-        <p:nvSpPr>
-          <p:cNvPr id="11" name="TextBox 10"/>
-          <p:cNvSpPr txBox="1"/>
-          <p:nvPr/>
-        </p:nvSpPr>
-        <p:spPr>
-          <a:xfrm>
-            <a:off x="2743200" y="5532120"/>
-            <a:ext cx="6675120" cy="411480"/>
-          </a:xfrm>
-          <a:prstGeom prst="rect">
-            <a:avLst/>
-          </a:prstGeom>
-          <a:noFill/>
-        </p:spPr>
-        <p:txBody>
-          <a:bodyPr wrap="square">
-            <a:spAutoFit/>
-          </a:bodyPr>
-          <a:lstStyle/>
-          <a:p>
-            <a:pPr algn="ctr">
-              <a:defRPr sz="1800" b="0">
-                <a:solidFill>
-                  <a:srgbClr val="A8B8D2"/>
-                </a:solidFill>
-              </a:defRPr>
-            </a:pPr>
-            <a:r>
-              <a:t>Any questions?</a:t>
-            </a:r>
-          </a:p>
-        </p:txBody>
-      </p:sp>
     </p:spTree>
   </p:cSld>
   <p:clrMapOvr>
     <a:masterClrMapping/>
   </p:clrMapOvr>
-  <mc:AlternateContent xmlns:mc="http://schemas.openxmlformats.org/markup-compatibility/2006">
-    <mc:Choice xmlns:p15="http://schemas.microsoft.com/office/powerpoint/2012/main" Requires="p15">
+  <mc:AlternateContent xmlns:mc="http://schemas.openxmlformats.org/markup-compatibility/2006" xmlns:p15="http://schemas.microsoft.com/office/powerpoint/2012/main">
+    <mc:Choice Requires="p15">
       <p:transition xmlns:p14="http://schemas.microsoft.com/office/powerpoint/2010/main" spd="slow" p14:dur="2000">
         <p15:prstTrans prst="fracture"/>
       </p:transition>
     </mc:Choice>
-    <mc:Fallback>
+    <mc:Fallback xmlns="">
       <p:transition spd="slow">
         <p:fade/>
       </p:transition>
@@ -9029,10 +7996,10 @@
       </p:cxnSp>
       <p:sp>
         <p:nvSpPr>
-          <p:cNvPr id="39" name="Circle: Hollow 38">
+          <p:cNvPr id="17" name="Oval 16">
             <a:extLst>
               <a:ext uri="{FF2B5EF4-FFF2-40B4-BE49-F238E27FC236}">
-                <a16:creationId xmlns:a16="http://schemas.microsoft.com/office/drawing/2014/main" id="{BD31A75F-FC67-E725-30E2-9282FF3F1EA4}"/>
+                <a16:creationId xmlns:a16="http://schemas.microsoft.com/office/drawing/2014/main" id="{4EE508D0-0DE6-A858-6D6E-8BD680957F2D}"/>
               </a:ext>
             </a:extLst>
           </p:cNvPr>
@@ -9041,15 +8008,12 @@
         </p:nvSpPr>
         <p:spPr>
           <a:xfrm>
-            <a:off x="5713688" y="2656982"/>
-            <a:ext cx="251460" cy="238480"/>
-          </a:xfrm>
-          <a:prstGeom prst="donut">
-            <a:avLst/>
-          </a:prstGeom>
-          <a:solidFill>
-            <a:srgbClr val="FF0000"/>
-          </a:solidFill>
+            <a:off x="5838508" y="2753118"/>
+            <a:ext cx="45719" cy="94325"/>
+          </a:xfrm>
+          <a:prstGeom prst="ellipse">
+            <a:avLst/>
+          </a:prstGeom>
         </p:spPr>
         <p:style>
           <a:lnRef idx="1">
@@ -9070,11 +8034,7 @@
           <a:lstStyle/>
           <a:p>
             <a:pPr algn="ctr"/>
-            <a:endParaRPr lang="en-IN">
-              <a:solidFill>
-                <a:schemeClr val="tx1"/>
-              </a:solidFill>
-            </a:endParaRPr>
+            <a:endParaRPr lang="en-IN"/>
           </a:p>
         </p:txBody>
       </p:sp>
@@ -9083,13 +8043,13 @@
   <p:clrMapOvr>
     <a:masterClrMapping/>
   </p:clrMapOvr>
-  <mc:AlternateContent xmlns:mc="http://schemas.openxmlformats.org/markup-compatibility/2006">
-    <mc:Choice xmlns:p14="http://schemas.microsoft.com/office/powerpoint/2010/main" Requires="p14">
+  <mc:AlternateContent xmlns:mc="http://schemas.openxmlformats.org/markup-compatibility/2006" xmlns:p14="http://schemas.microsoft.com/office/powerpoint/2010/main">
+    <mc:Choice Requires="p14">
       <p:transition spd="slow" p14:dur="1300">
         <p14:pan dir="u"/>
       </p:transition>
     </mc:Choice>
-    <mc:Fallback>
+    <mc:Fallback xmlns="">
       <p:transition spd="slow">
         <p:fade/>
       </p:transition>
@@ -9590,13 +8550,13 @@
   <p:clrMapOvr>
     <a:masterClrMapping/>
   </p:clrMapOvr>
-  <mc:AlternateContent xmlns:mc="http://schemas.openxmlformats.org/markup-compatibility/2006">
-    <mc:Choice xmlns:p14="http://schemas.microsoft.com/office/powerpoint/2010/main" Requires="p14">
+  <mc:AlternateContent xmlns:mc="http://schemas.openxmlformats.org/markup-compatibility/2006" xmlns:p14="http://schemas.microsoft.com/office/powerpoint/2010/main">
+    <mc:Choice Requires="p14">
       <p:transition spd="slow" p14:dur="2000">
         <p14:ferris dir="l"/>
       </p:transition>
     </mc:Choice>
-    <mc:Fallback>
+    <mc:Fallback xmlns="">
       <p:transition spd="slow">
         <p:fade/>
       </p:transition>
@@ -10249,13 +9209,13 @@
   <p:clrMapOvr>
     <a:masterClrMapping/>
   </p:clrMapOvr>
-  <mc:AlternateContent xmlns:mc="http://schemas.openxmlformats.org/markup-compatibility/2006">
-    <mc:Choice xmlns:p14="http://schemas.microsoft.com/office/powerpoint/2010/main" Requires="p14">
+  <mc:AlternateContent xmlns:mc="http://schemas.openxmlformats.org/markup-compatibility/2006" xmlns:p14="http://schemas.microsoft.com/office/powerpoint/2010/main">
+    <mc:Choice Requires="p14">
       <p:transition spd="slow" p14:dur="800">
         <p14:flythrough/>
       </p:transition>
     </mc:Choice>
-    <mc:Fallback>
+    <mc:Fallback xmlns="">
       <p:transition spd="slow">
         <p:fade/>
       </p:transition>
@@ -11001,13 +9961,13 @@
   <p:clrMapOvr>
     <a:masterClrMapping/>
   </p:clrMapOvr>
-  <mc:AlternateContent xmlns:mc="http://schemas.openxmlformats.org/markup-compatibility/2006">
-    <mc:Choice xmlns:p15="http://schemas.microsoft.com/office/powerpoint/2012/main" Requires="p15">
+  <mc:AlternateContent xmlns:mc="http://schemas.openxmlformats.org/markup-compatibility/2006" xmlns:p15="http://schemas.microsoft.com/office/powerpoint/2012/main">
+    <mc:Choice Requires="p15">
       <p:transition xmlns:p14="http://schemas.microsoft.com/office/powerpoint/2010/main" spd="slow" p14:dur="1250">
         <p15:prstTrans prst="airplane"/>
       </p:transition>
     </mc:Choice>
-    <mc:Fallback>
+    <mc:Fallback xmlns="">
       <p:transition spd="slow">
         <p:fade/>
       </p:transition>
@@ -11799,13 +10759,13 @@
   <p:clrMapOvr>
     <a:masterClrMapping/>
   </p:clrMapOvr>
-  <mc:AlternateContent xmlns:mc="http://schemas.openxmlformats.org/markup-compatibility/2006">
-    <mc:Choice xmlns:p14="http://schemas.microsoft.com/office/powerpoint/2010/main" Requires="p14">
+  <mc:AlternateContent xmlns:mc="http://schemas.openxmlformats.org/markup-compatibility/2006" xmlns:p14="http://schemas.microsoft.com/office/powerpoint/2010/main">
+    <mc:Choice Requires="p14">
       <p:transition spd="slow" p14:dur="1500">
         <p14:window dir="vert"/>
       </p:transition>
     </mc:Choice>
-    <mc:Fallback>
+    <mc:Fallback xmlns="">
       <p:transition spd="slow">
         <p:fade/>
       </p:transition>
@@ -12543,13 +11503,13 @@
   <p:clrMapOvr>
     <a:masterClrMapping/>
   </p:clrMapOvr>
-  <mc:AlternateContent xmlns:mc="http://schemas.openxmlformats.org/markup-compatibility/2006">
-    <mc:Choice xmlns:p14="http://schemas.microsoft.com/office/powerpoint/2010/main" Requires="p14">
+  <mc:AlternateContent xmlns:mc="http://schemas.openxmlformats.org/markup-compatibility/2006" xmlns:p14="http://schemas.microsoft.com/office/powerpoint/2010/main">
+    <mc:Choice Requires="p14">
       <p:transition spd="slow" p14:dur="1600">
         <p:blinds dir="vert"/>
       </p:transition>
     </mc:Choice>
-    <mc:Fallback>
+    <mc:Fallback xmlns="">
       <p:transition spd="slow">
         <p:blinds dir="vert"/>
       </p:transition>
